--- a/samples/hanbit/documents/분기실적보고.pptx
+++ b/samples/hanbit/documents/분기실적보고.pptx
@@ -3209,7 +3209,7 @@
               <a:defRPr sz="1500"/>
             </a:pPr>
             <a:r>
-              <a:t>• 2026년 1월부터 9월까지 청구서 301건, 청구금액 169.7억원을 발행했고 수납금액은 142.4억원으로 수납률은 83.9%이다</a:t>
+              <a:t>• 2026년 1월부터 9월까지 청구서 303건, 청구금액 101.2억원을 발행했고 수납금액은 85.6억원으로 수납률은 84.6%이다</a:t>
             </a:r>
           </a:p>
           <a:p>
@@ -3220,7 +3220,7 @@
               <a:defRPr sz="1500"/>
             </a:pPr>
             <a:r>
-              <a:t>• 3분기 청구금액은 91.4억원으로 2분기 35.2억원와 비교하여 늘었다</a:t>
+              <a:t>• 3분기 청구금액은 29.8억원으로 2분기 36.8억원과 비교하여 줄었다</a:t>
             </a:r>
           </a:p>
           <a:p>
@@ -3231,7 +3231,7 @@
               <a:defRPr sz="1500"/>
             </a:pPr>
             <a:r>
-              <a:t>• 기준일 현재 진행중인 계약은 158건이며 올해 새로 시작한 계약은 79건이다</a:t>
+              <a:t>• 기준일 현재 진행중인 계약은 148건이며 올해 새로 시작한 계약은 57건이다</a:t>
             </a:r>
           </a:p>
           <a:p>
@@ -3242,7 +3242,7 @@
               <a:defRPr sz="1500"/>
             </a:pPr>
             <a:r>
-              <a:t>• 연체 청구서의 미수금 합계는 67.8억원으로 연체 고객 관리가 계속 필요하다</a:t>
+              <a:t>• 연체 청구서의 미수금 합계는 51.3억원으로 연체 고객 관리가 계속 필요하다</a:t>
             </a:r>
           </a:p>
           <a:p>
@@ -3254,6 +3254,17 @@
             </a:pPr>
             <a:r>
               <a:t>• 이 보고서의 금액은 모두 부가가치세를 제외한 원 단위 금액을 억원으로 줄여 표시하였다</a:t>
+            </a:r>
+          </a:p>
+          <a:p>
+            <a:pPr>
+              <a:spcAft>
+                <a:spcPts val="800"/>
+              </a:spcAft>
+              <a:defRPr sz="1500"/>
+            </a:pPr>
+            <a:r>
+              <a:t>• 지난해 같은 기간(1~9월) 수납률은 91.5%이었고 올해는 84.6%이며, 연체 미수금이 많은 고객은 별도 장에 정리하였다</a:t>
             </a:r>
           </a:p>
         </p:txBody>
@@ -3337,7 +3348,7 @@
                         <a:defRPr sz="1200"/>
                       </a:pPr>
                       <a:r>
-                        <a:t>301건</a:t>
+                        <a:t>303건</a:t>
                       </a:r>
                     </a:p>
                   </a:txBody>
@@ -3369,7 +3380,7 @@
                         <a:defRPr sz="1200"/>
                       </a:pPr>
                       <a:r>
-                        <a:t>169.7억원</a:t>
+                        <a:t>101.2억원</a:t>
                       </a:r>
                     </a:p>
                   </a:txBody>
@@ -3401,7 +3412,7 @@
                         <a:defRPr sz="1200"/>
                       </a:pPr>
                       <a:r>
-                        <a:t>142.4억원</a:t>
+                        <a:t>85.6억원</a:t>
                       </a:r>
                     </a:p>
                   </a:txBody>
@@ -3433,7 +3444,7 @@
                         <a:defRPr sz="1200"/>
                       </a:pPr>
                       <a:r>
-                        <a:t>83.9%</a:t>
+                        <a:t>84.6%</a:t>
                       </a:r>
                     </a:p>
                   </a:txBody>
@@ -3559,7 +3570,7 @@
               <a:defRPr sz="1500"/>
             </a:pPr>
             <a:r>
-              <a:t>• 2025년 같은 분기와 비교하면 계약 갱신이 늘어난 분기에 청구금액도 함께 늘었다</a:t>
+              <a:t>• 2025년 같은 분기와 비교할 때는 그 분기의 계약 갱신 건수와 신규 계약 건수를 함께 본다</a:t>
             </a:r>
           </a:p>
         </p:txBody>
@@ -3691,52 +3702,52 @@
                         <a:defRPr sz="1200"/>
                       </a:pPr>
                       <a:r>
-                        <a:t>57건</a:t>
-                      </a:r>
-                    </a:p>
-                  </a:txBody>
-                  <a:tcPr/>
-                </a:tc>
-                <a:tc>
-                  <a:txBody>
-                    <a:bodyPr/>
-                    <a:lstStyle/>
-                    <a:p>
-                      <a:pPr>
-                        <a:defRPr sz="1200"/>
-                      </a:pPr>
-                      <a:r>
-                        <a:t>21.8억원</a:t>
-                      </a:r>
-                    </a:p>
-                  </a:txBody>
-                  <a:tcPr/>
-                </a:tc>
-                <a:tc>
-                  <a:txBody>
-                    <a:bodyPr/>
-                    <a:lstStyle/>
-                    <a:p>
-                      <a:pPr>
-                        <a:defRPr sz="1200"/>
-                      </a:pPr>
-                      <a:r>
-                        <a:t>17.8억원</a:t>
-                      </a:r>
-                    </a:p>
-                  </a:txBody>
-                  <a:tcPr/>
-                </a:tc>
-                <a:tc>
-                  <a:txBody>
-                    <a:bodyPr/>
-                    <a:lstStyle/>
-                    <a:p>
-                      <a:pPr>
-                        <a:defRPr sz="1200"/>
-                      </a:pPr>
-                      <a:r>
-                        <a:t>81.6%</a:t>
+                        <a:t>63건</a:t>
+                      </a:r>
+                    </a:p>
+                  </a:txBody>
+                  <a:tcPr/>
+                </a:tc>
+                <a:tc>
+                  <a:txBody>
+                    <a:bodyPr/>
+                    <a:lstStyle/>
+                    <a:p>
+                      <a:pPr>
+                        <a:defRPr sz="1200"/>
+                      </a:pPr>
+                      <a:r>
+                        <a:t>23.5억원</a:t>
+                      </a:r>
+                    </a:p>
+                  </a:txBody>
+                  <a:tcPr/>
+                </a:tc>
+                <a:tc>
+                  <a:txBody>
+                    <a:bodyPr/>
+                    <a:lstStyle/>
+                    <a:p>
+                      <a:pPr>
+                        <a:defRPr sz="1200"/>
+                      </a:pPr>
+                      <a:r>
+                        <a:t>21.3억원</a:t>
+                      </a:r>
+                    </a:p>
+                  </a:txBody>
+                  <a:tcPr/>
+                </a:tc>
+                <a:tc>
+                  <a:txBody>
+                    <a:bodyPr/>
+                    <a:lstStyle/>
+                    <a:p>
+                      <a:pPr>
+                        <a:defRPr sz="1200"/>
+                      </a:pPr>
+                      <a:r>
+                        <a:t>90.4%</a:t>
                       </a:r>
                     </a:p>
                   </a:txBody>
@@ -3768,52 +3779,52 @@
                         <a:defRPr sz="1200"/>
                       </a:pPr>
                       <a:r>
-                        <a:t>81건</a:t>
-                      </a:r>
-                    </a:p>
-                  </a:txBody>
-                  <a:tcPr/>
-                </a:tc>
-                <a:tc>
-                  <a:txBody>
-                    <a:bodyPr/>
-                    <a:lstStyle/>
-                    <a:p>
-                      <a:pPr>
-                        <a:defRPr sz="1200"/>
-                      </a:pPr>
-                      <a:r>
-                        <a:t>33.2억원</a:t>
-                      </a:r>
-                    </a:p>
-                  </a:txBody>
-                  <a:tcPr/>
-                </a:tc>
-                <a:tc>
-                  <a:txBody>
-                    <a:bodyPr/>
-                    <a:lstStyle/>
-                    <a:p>
-                      <a:pPr>
-                        <a:defRPr sz="1200"/>
-                      </a:pPr>
-                      <a:r>
-                        <a:t>25.4억원</a:t>
-                      </a:r>
-                    </a:p>
-                  </a:txBody>
-                  <a:tcPr/>
-                </a:tc>
-                <a:tc>
-                  <a:txBody>
-                    <a:bodyPr/>
-                    <a:lstStyle/>
-                    <a:p>
-                      <a:pPr>
-                        <a:defRPr sz="1200"/>
-                      </a:pPr>
-                      <a:r>
-                        <a:t>76.3%</a:t>
+                        <a:t>72건</a:t>
+                      </a:r>
+                    </a:p>
+                  </a:txBody>
+                  <a:tcPr/>
+                </a:tc>
+                <a:tc>
+                  <a:txBody>
+                    <a:bodyPr/>
+                    <a:lstStyle/>
+                    <a:p>
+                      <a:pPr>
+                        <a:defRPr sz="1200"/>
+                      </a:pPr>
+                      <a:r>
+                        <a:t>25.3억원</a:t>
+                      </a:r>
+                    </a:p>
+                  </a:txBody>
+                  <a:tcPr/>
+                </a:tc>
+                <a:tc>
+                  <a:txBody>
+                    <a:bodyPr/>
+                    <a:lstStyle/>
+                    <a:p>
+                      <a:pPr>
+                        <a:defRPr sz="1200"/>
+                      </a:pPr>
+                      <a:r>
+                        <a:t>23.3억원</a:t>
+                      </a:r>
+                    </a:p>
+                  </a:txBody>
+                  <a:tcPr/>
+                </a:tc>
+                <a:tc>
+                  <a:txBody>
+                    <a:bodyPr/>
+                    <a:lstStyle/>
+                    <a:p>
+                      <a:pPr>
+                        <a:defRPr sz="1200"/>
+                      </a:pPr>
+                      <a:r>
+                        <a:t>92.2%</a:t>
                       </a:r>
                     </a:p>
                   </a:txBody>
@@ -3845,52 +3856,52 @@
                         <a:defRPr sz="1200"/>
                       </a:pPr>
                       <a:r>
-                        <a:t>68건</a:t>
-                      </a:r>
-                    </a:p>
-                  </a:txBody>
-                  <a:tcPr/>
-                </a:tc>
-                <a:tc>
-                  <a:txBody>
-                    <a:bodyPr/>
-                    <a:lstStyle/>
-                    <a:p>
-                      <a:pPr>
-                        <a:defRPr sz="1200"/>
-                      </a:pPr>
-                      <a:r>
-                        <a:t>26.4억원</a:t>
-                      </a:r>
-                    </a:p>
-                  </a:txBody>
-                  <a:tcPr/>
-                </a:tc>
-                <a:tc>
-                  <a:txBody>
-                    <a:bodyPr/>
-                    <a:lstStyle/>
-                    <a:p>
-                      <a:pPr>
-                        <a:defRPr sz="1200"/>
-                      </a:pPr>
-                      <a:r>
-                        <a:t>23.4억원</a:t>
-                      </a:r>
-                    </a:p>
-                  </a:txBody>
-                  <a:tcPr/>
-                </a:tc>
-                <a:tc>
-                  <a:txBody>
-                    <a:bodyPr/>
-                    <a:lstStyle/>
-                    <a:p>
-                      <a:pPr>
-                        <a:defRPr sz="1200"/>
-                      </a:pPr>
-                      <a:r>
-                        <a:t>88.7%</a:t>
+                        <a:t>72건</a:t>
+                      </a:r>
+                    </a:p>
+                  </a:txBody>
+                  <a:tcPr/>
+                </a:tc>
+                <a:tc>
+                  <a:txBody>
+                    <a:bodyPr/>
+                    <a:lstStyle/>
+                    <a:p>
+                      <a:pPr>
+                        <a:defRPr sz="1200"/>
+                      </a:pPr>
+                      <a:r>
+                        <a:t>30.6억원</a:t>
+                      </a:r>
+                    </a:p>
+                  </a:txBody>
+                  <a:tcPr/>
+                </a:tc>
+                <a:tc>
+                  <a:txBody>
+                    <a:bodyPr/>
+                    <a:lstStyle/>
+                    <a:p>
+                      <a:pPr>
+                        <a:defRPr sz="1200"/>
+                      </a:pPr>
+                      <a:r>
+                        <a:t>28.0억원</a:t>
+                      </a:r>
+                    </a:p>
+                  </a:txBody>
+                  <a:tcPr/>
+                </a:tc>
+                <a:tc>
+                  <a:txBody>
+                    <a:bodyPr/>
+                    <a:lstStyle/>
+                    <a:p>
+                      <a:pPr>
+                        <a:defRPr sz="1200"/>
+                      </a:pPr>
+                      <a:r>
+                        <a:t>91.6%</a:t>
                       </a:r>
                     </a:p>
                   </a:txBody>
@@ -3922,52 +3933,52 @@
                         <a:defRPr sz="1200"/>
                       </a:pPr>
                       <a:r>
-                        <a:t>73건</a:t>
-                      </a:r>
-                    </a:p>
-                  </a:txBody>
-                  <a:tcPr/>
-                </a:tc>
-                <a:tc>
-                  <a:txBody>
-                    <a:bodyPr/>
-                    <a:lstStyle/>
-                    <a:p>
-                      <a:pPr>
-                        <a:defRPr sz="1200"/>
-                      </a:pPr>
-                      <a:r>
-                        <a:t>28.8억원</a:t>
-                      </a:r>
-                    </a:p>
-                  </a:txBody>
-                  <a:tcPr/>
-                </a:tc>
-                <a:tc>
-                  <a:txBody>
-                    <a:bodyPr/>
-                    <a:lstStyle/>
-                    <a:p>
-                      <a:pPr>
-                        <a:defRPr sz="1200"/>
-                      </a:pPr>
-                      <a:r>
-                        <a:t>27.9억원</a:t>
-                      </a:r>
-                    </a:p>
-                  </a:txBody>
-                  <a:tcPr/>
-                </a:tc>
-                <a:tc>
-                  <a:txBody>
-                    <a:bodyPr/>
-                    <a:lstStyle/>
-                    <a:p>
-                      <a:pPr>
-                        <a:defRPr sz="1200"/>
-                      </a:pPr>
-                      <a:r>
-                        <a:t>96.8%</a:t>
+                        <a:t>83건</a:t>
+                      </a:r>
+                    </a:p>
+                  </a:txBody>
+                  <a:tcPr/>
+                </a:tc>
+                <a:tc>
+                  <a:txBody>
+                    <a:bodyPr/>
+                    <a:lstStyle/>
+                    <a:p>
+                      <a:pPr>
+                        <a:defRPr sz="1200"/>
+                      </a:pPr>
+                      <a:r>
+                        <a:t>29.4억원</a:t>
+                      </a:r>
+                    </a:p>
+                  </a:txBody>
+                  <a:tcPr/>
+                </a:tc>
+                <a:tc>
+                  <a:txBody>
+                    <a:bodyPr/>
+                    <a:lstStyle/>
+                    <a:p>
+                      <a:pPr>
+                        <a:defRPr sz="1200"/>
+                      </a:pPr>
+                      <a:r>
+                        <a:t>27.5억원</a:t>
+                      </a:r>
+                    </a:p>
+                  </a:txBody>
+                  <a:tcPr/>
+                </a:tc>
+                <a:tc>
+                  <a:txBody>
+                    <a:bodyPr/>
+                    <a:lstStyle/>
+                    <a:p>
+                      <a:pPr>
+                        <a:defRPr sz="1200"/>
+                      </a:pPr>
+                      <a:r>
+                        <a:t>93.5%</a:t>
                       </a:r>
                     </a:p>
                   </a:txBody>
@@ -3999,52 +4010,52 @@
                         <a:defRPr sz="1200"/>
                       </a:pPr>
                       <a:r>
-                        <a:t>88건</a:t>
-                      </a:r>
-                    </a:p>
-                  </a:txBody>
-                  <a:tcPr/>
-                </a:tc>
-                <a:tc>
-                  <a:txBody>
-                    <a:bodyPr/>
-                    <a:lstStyle/>
-                    <a:p>
-                      <a:pPr>
-                        <a:defRPr sz="1200"/>
-                      </a:pPr>
-                      <a:r>
-                        <a:t>43.1억원</a:t>
-                      </a:r>
-                    </a:p>
-                  </a:txBody>
-                  <a:tcPr/>
-                </a:tc>
-                <a:tc>
-                  <a:txBody>
-                    <a:bodyPr/>
-                    <a:lstStyle/>
-                    <a:p>
-                      <a:pPr>
-                        <a:defRPr sz="1200"/>
-                      </a:pPr>
-                      <a:r>
-                        <a:t>39.6억원</a:t>
-                      </a:r>
-                    </a:p>
-                  </a:txBody>
-                  <a:tcPr/>
-                </a:tc>
-                <a:tc>
-                  <a:txBody>
-                    <a:bodyPr/>
-                    <a:lstStyle/>
-                    <a:p>
-                      <a:pPr>
-                        <a:defRPr sz="1200"/>
-                      </a:pPr>
-                      <a:r>
-                        <a:t>91.9%</a:t>
+                        <a:t>82건</a:t>
+                      </a:r>
+                    </a:p>
+                  </a:txBody>
+                  <a:tcPr/>
+                </a:tc>
+                <a:tc>
+                  <a:txBody>
+                    <a:bodyPr/>
+                    <a:lstStyle/>
+                    <a:p>
+                      <a:pPr>
+                        <a:defRPr sz="1200"/>
+                      </a:pPr>
+                      <a:r>
+                        <a:t>34.6억원</a:t>
+                      </a:r>
+                    </a:p>
+                  </a:txBody>
+                  <a:tcPr/>
+                </a:tc>
+                <a:tc>
+                  <a:txBody>
+                    <a:bodyPr/>
+                    <a:lstStyle/>
+                    <a:p>
+                      <a:pPr>
+                        <a:defRPr sz="1200"/>
+                      </a:pPr>
+                      <a:r>
+                        <a:t>28.2억원</a:t>
+                      </a:r>
+                    </a:p>
+                  </a:txBody>
+                  <a:tcPr/>
+                </a:tc>
+                <a:tc>
+                  <a:txBody>
+                    <a:bodyPr/>
+                    <a:lstStyle/>
+                    <a:p>
+                      <a:pPr>
+                        <a:defRPr sz="1200"/>
+                      </a:pPr>
+                      <a:r>
+                        <a:t>81.5%</a:t>
                       </a:r>
                     </a:p>
                   </a:txBody>
@@ -4076,52 +4087,52 @@
                         <a:defRPr sz="1200"/>
                       </a:pPr>
                       <a:r>
-                        <a:t>76건</a:t>
-                      </a:r>
-                    </a:p>
-                  </a:txBody>
-                  <a:tcPr/>
-                </a:tc>
-                <a:tc>
-                  <a:txBody>
-                    <a:bodyPr/>
-                    <a:lstStyle/>
-                    <a:p>
-                      <a:pPr>
-                        <a:defRPr sz="1200"/>
-                      </a:pPr>
-                      <a:r>
-                        <a:t>35.2억원</a:t>
-                      </a:r>
-                    </a:p>
-                  </a:txBody>
-                  <a:tcPr/>
-                </a:tc>
-                <a:tc>
-                  <a:txBody>
-                    <a:bodyPr/>
-                    <a:lstStyle/>
-                    <a:p>
-                      <a:pPr>
-                        <a:defRPr sz="1200"/>
-                      </a:pPr>
-                      <a:r>
-                        <a:t>32.7억원</a:t>
-                      </a:r>
-                    </a:p>
-                  </a:txBody>
-                  <a:tcPr/>
-                </a:tc>
-                <a:tc>
-                  <a:txBody>
-                    <a:bodyPr/>
-                    <a:lstStyle/>
-                    <a:p>
-                      <a:pPr>
-                        <a:defRPr sz="1200"/>
-                      </a:pPr>
-                      <a:r>
-                        <a:t>92.7%</a:t>
+                        <a:t>113건</a:t>
+                      </a:r>
+                    </a:p>
+                  </a:txBody>
+                  <a:tcPr/>
+                </a:tc>
+                <a:tc>
+                  <a:txBody>
+                    <a:bodyPr/>
+                    <a:lstStyle/>
+                    <a:p>
+                      <a:pPr>
+                        <a:defRPr sz="1200"/>
+                      </a:pPr>
+                      <a:r>
+                        <a:t>36.8억원</a:t>
+                      </a:r>
+                    </a:p>
+                  </a:txBody>
+                  <a:tcPr/>
+                </a:tc>
+                <a:tc>
+                  <a:txBody>
+                    <a:bodyPr/>
+                    <a:lstStyle/>
+                    <a:p>
+                      <a:pPr>
+                        <a:defRPr sz="1200"/>
+                      </a:pPr>
+                      <a:r>
+                        <a:t>33.2억원</a:t>
+                      </a:r>
+                    </a:p>
+                  </a:txBody>
+                  <a:tcPr/>
+                </a:tc>
+                <a:tc>
+                  <a:txBody>
+                    <a:bodyPr/>
+                    <a:lstStyle/>
+                    <a:p>
+                      <a:pPr>
+                        <a:defRPr sz="1200"/>
+                      </a:pPr>
+                      <a:r>
+                        <a:t>90.3%</a:t>
                       </a:r>
                     </a:p>
                   </a:txBody>
@@ -4153,52 +4164,52 @@
                         <a:defRPr sz="1200"/>
                       </a:pPr>
                       <a:r>
-                        <a:t>137건</a:t>
-                      </a:r>
-                    </a:p>
-                  </a:txBody>
-                  <a:tcPr/>
-                </a:tc>
-                <a:tc>
-                  <a:txBody>
-                    <a:bodyPr/>
-                    <a:lstStyle/>
-                    <a:p>
-                      <a:pPr>
-                        <a:defRPr sz="1200"/>
-                      </a:pPr>
-                      <a:r>
-                        <a:t>91.4억원</a:t>
-                      </a:r>
-                    </a:p>
-                  </a:txBody>
-                  <a:tcPr/>
-                </a:tc>
-                <a:tc>
-                  <a:txBody>
-                    <a:bodyPr/>
-                    <a:lstStyle/>
-                    <a:p>
-                      <a:pPr>
-                        <a:defRPr sz="1200"/>
-                      </a:pPr>
-                      <a:r>
-                        <a:t>70.2억원</a:t>
-                      </a:r>
-                    </a:p>
-                  </a:txBody>
-                  <a:tcPr/>
-                </a:tc>
-                <a:tc>
-                  <a:txBody>
-                    <a:bodyPr/>
-                    <a:lstStyle/>
-                    <a:p>
-                      <a:pPr>
-                        <a:defRPr sz="1200"/>
-                      </a:pPr>
-                      <a:r>
-                        <a:t>76.8%</a:t>
+                        <a:t>108건</a:t>
+                      </a:r>
+                    </a:p>
+                  </a:txBody>
+                  <a:tcPr/>
+                </a:tc>
+                <a:tc>
+                  <a:txBody>
+                    <a:bodyPr/>
+                    <a:lstStyle/>
+                    <a:p>
+                      <a:pPr>
+                        <a:defRPr sz="1200"/>
+                      </a:pPr>
+                      <a:r>
+                        <a:t>29.8억원</a:t>
+                      </a:r>
+                    </a:p>
+                  </a:txBody>
+                  <a:tcPr/>
+                </a:tc>
+                <a:tc>
+                  <a:txBody>
+                    <a:bodyPr/>
+                    <a:lstStyle/>
+                    <a:p>
+                      <a:pPr>
+                        <a:defRPr sz="1200"/>
+                      </a:pPr>
+                      <a:r>
+                        <a:t>24.2억원</a:t>
+                      </a:r>
+                    </a:p>
+                  </a:txBody>
+                  <a:tcPr/>
+                </a:tc>
+                <a:tc>
+                  <a:txBody>
+                    <a:bodyPr/>
+                    <a:lstStyle/>
+                    <a:p>
+                      <a:pPr>
+                        <a:defRPr sz="1200"/>
+                      </a:pPr>
+                      <a:r>
+                        <a:t>81.3%</a:t>
                       </a:r>
                     </a:p>
                   </a:txBody>
@@ -4291,7 +4302,7 @@
               <a:defRPr sz="1500"/>
             </a:pPr>
             <a:r>
-              <a:t>• 올해 청구금액이 가장 많은 팀은 영업1팀이며, 대형 건설 계약의 정기 청구가 큰 몫을 차지했다</a:t>
+              <a:t>• 올해 청구금액이 가장 많은 팀은 영업1팀이며, 팀별 금액은 아래 표와 같다</a:t>
             </a:r>
           </a:p>
           <a:p>
@@ -4314,6 +4325,17 @@
             </a:pPr>
             <a:r>
               <a:t>• 수납률이 낮은 팀은 연체 고객 주간 보고를 바탕으로 담당자별 방문 계획을 세운다</a:t>
+            </a:r>
+          </a:p>
+          <a:p>
+            <a:pPr>
+              <a:spcAft>
+                <a:spcPts val="800"/>
+              </a:spcAft>
+              <a:defRPr sz="1500"/>
+            </a:pPr>
+            <a:r>
+              <a:t>• 팀별 청구 건수에는 담당자가 바뀐 계약도 새 담당자의 팀으로 포함하였다</a:t>
             </a:r>
           </a:p>
         </p:txBody>
@@ -4429,37 +4451,37 @@
                         <a:defRPr sz="1200"/>
                       </a:pPr>
                       <a:r>
-                        <a:t>143건</a:t>
-                      </a:r>
-                    </a:p>
-                  </a:txBody>
-                  <a:tcPr/>
-                </a:tc>
-                <a:tc>
-                  <a:txBody>
-                    <a:bodyPr/>
-                    <a:lstStyle/>
-                    <a:p>
-                      <a:pPr>
-                        <a:defRPr sz="1200"/>
-                      </a:pPr>
-                      <a:r>
-                        <a:t>80.2억원</a:t>
-                      </a:r>
-                    </a:p>
-                  </a:txBody>
-                  <a:tcPr/>
-                </a:tc>
-                <a:tc>
-                  <a:txBody>
-                    <a:bodyPr/>
-                    <a:lstStyle/>
-                    <a:p>
-                      <a:pPr>
-                        <a:defRPr sz="1200"/>
-                      </a:pPr>
-                      <a:r>
-                        <a:t>76.4%</a:t>
+                        <a:t>127건</a:t>
+                      </a:r>
+                    </a:p>
+                  </a:txBody>
+                  <a:tcPr/>
+                </a:tc>
+                <a:tc>
+                  <a:txBody>
+                    <a:bodyPr/>
+                    <a:lstStyle/>
+                    <a:p>
+                      <a:pPr>
+                        <a:defRPr sz="1200"/>
+                      </a:pPr>
+                      <a:r>
+                        <a:t>43.3억원</a:t>
+                      </a:r>
+                    </a:p>
+                  </a:txBody>
+                  <a:tcPr/>
+                </a:tc>
+                <a:tc>
+                  <a:txBody>
+                    <a:bodyPr/>
+                    <a:lstStyle/>
+                    <a:p>
+                      <a:pPr>
+                        <a:defRPr sz="1200"/>
+                      </a:pPr>
+                      <a:r>
+                        <a:t>78.9%</a:t>
                       </a:r>
                     </a:p>
                   </a:txBody>
@@ -4491,37 +4513,37 @@
                         <a:defRPr sz="1200"/>
                       </a:pPr>
                       <a:r>
-                        <a:t>96건</a:t>
-                      </a:r>
-                    </a:p>
-                  </a:txBody>
-                  <a:tcPr/>
-                </a:tc>
-                <a:tc>
-                  <a:txBody>
-                    <a:bodyPr/>
-                    <a:lstStyle/>
-                    <a:p>
-                      <a:pPr>
-                        <a:defRPr sz="1200"/>
-                      </a:pPr>
-                      <a:r>
-                        <a:t>52.1억원</a:t>
-                      </a:r>
-                    </a:p>
-                  </a:txBody>
-                  <a:tcPr/>
-                </a:tc>
-                <a:tc>
-                  <a:txBody>
-                    <a:bodyPr/>
-                    <a:lstStyle/>
-                    <a:p>
-                      <a:pPr>
-                        <a:defRPr sz="1200"/>
-                      </a:pPr>
-                      <a:r>
-                        <a:t>88.0%</a:t>
+                        <a:t>103건</a:t>
+                      </a:r>
+                    </a:p>
+                  </a:txBody>
+                  <a:tcPr/>
+                </a:tc>
+                <a:tc>
+                  <a:txBody>
+                    <a:bodyPr/>
+                    <a:lstStyle/>
+                    <a:p>
+                      <a:pPr>
+                        <a:defRPr sz="1200"/>
+                      </a:pPr>
+                      <a:r>
+                        <a:t>33.2억원</a:t>
+                      </a:r>
+                    </a:p>
+                  </a:txBody>
+                  <a:tcPr/>
+                </a:tc>
+                <a:tc>
+                  <a:txBody>
+                    <a:bodyPr/>
+                    <a:lstStyle/>
+                    <a:p>
+                      <a:pPr>
+                        <a:defRPr sz="1200"/>
+                      </a:pPr>
+                      <a:r>
+                        <a:t>88.5%</a:t>
                       </a:r>
                     </a:p>
                   </a:txBody>
@@ -4553,37 +4575,37 @@
                         <a:defRPr sz="1200"/>
                       </a:pPr>
                       <a:r>
-                        <a:t>62건</a:t>
-                      </a:r>
-                    </a:p>
-                  </a:txBody>
-                  <a:tcPr/>
-                </a:tc>
-                <a:tc>
-                  <a:txBody>
-                    <a:bodyPr/>
-                    <a:lstStyle/>
-                    <a:p>
-                      <a:pPr>
-                        <a:defRPr sz="1200"/>
-                      </a:pPr>
-                      <a:r>
-                        <a:t>37.4억원</a:t>
-                      </a:r>
-                    </a:p>
-                  </a:txBody>
-                  <a:tcPr/>
-                </a:tc>
-                <a:tc>
-                  <a:txBody>
-                    <a:bodyPr/>
-                    <a:lstStyle/>
-                    <a:p>
-                      <a:pPr>
-                        <a:defRPr sz="1200"/>
-                      </a:pPr>
-                      <a:r>
-                        <a:t>94.3%</a:t>
+                        <a:t>73건</a:t>
+                      </a:r>
+                    </a:p>
+                  </a:txBody>
+                  <a:tcPr/>
+                </a:tc>
+                <a:tc>
+                  <a:txBody>
+                    <a:bodyPr/>
+                    <a:lstStyle/>
+                    <a:p>
+                      <a:pPr>
+                        <a:defRPr sz="1200"/>
+                      </a:pPr>
+                      <a:r>
+                        <a:t>24.7억원</a:t>
+                      </a:r>
+                    </a:p>
+                  </a:txBody>
+                  <a:tcPr/>
+                </a:tc>
+                <a:tc>
+                  <a:txBody>
+                    <a:bodyPr/>
+                    <a:lstStyle/>
+                    <a:p>
+                      <a:pPr>
+                        <a:defRPr sz="1200"/>
+                      </a:pPr>
+                      <a:r>
+                        <a:t>89.4%</a:t>
                       </a:r>
                     </a:p>
                   </a:txBody>
@@ -4676,7 +4698,7 @@
               <a:defRPr sz="1500"/>
             </a:pPr>
             <a:r>
-              <a:t>• 제조 업종 고객이 고객 수와 청구금액 모두에서 가장 큰 비중을 차지한다</a:t>
+              <a:t>• 올해 청구금액이 가장 많은 업종은 제조이고 가장 적은 업종은 물류이다</a:t>
             </a:r>
           </a:p>
           <a:p>
@@ -4687,7 +4709,7 @@
               <a:defRPr sz="1500"/>
             </a:pPr>
             <a:r>
-              <a:t>• 공공기관 고객은 건수는 적지만 연체가 거의 없어 수납률이 높다</a:t>
+              <a:t>• 수납률이 가장 높은 업종은 물류(93.5%)이고 가장 낮은 업종은 도소매(72.9%)이다</a:t>
             </a:r>
           </a:p>
           <a:p>
@@ -4698,7 +4720,7 @@
               <a:defRPr sz="1500"/>
             </a:pPr>
             <a:r>
-              <a:t>• 건설 업종은 현장 일정에 따라 주문이 몰리므로 분기마다 청구금액의 변동이 크다</a:t>
+              <a:t>• 건설 업종은 현장 일정에 따라 주문이 몰리므로 분기별 청구금액을 함께 살펴야 한다</a:t>
             </a:r>
           </a:p>
           <a:p>
@@ -4709,7 +4731,7 @@
               <a:defRPr sz="1500"/>
             </a:pPr>
             <a:r>
-              <a:t>• 도소매 업종은 주문 한 건의 금액은 작지만 주문 건수가 많아 출고 업무의 부담이 크다</a:t>
+              <a:t>• 도소매 업종 고객에게는 소량 주문을 묶어 출고하는 방안을 영업팀과 물류팀이 함께 검토한다</a:t>
             </a:r>
           </a:p>
         </p:txBody>
@@ -4840,22 +4862,22 @@
                         <a:defRPr sz="1200"/>
                       </a:pPr>
                       <a:r>
-                        <a:t>79.1억원</a:t>
-                      </a:r>
-                    </a:p>
-                  </a:txBody>
-                  <a:tcPr/>
-                </a:tc>
-                <a:tc>
-                  <a:txBody>
-                    <a:bodyPr/>
-                    <a:lstStyle/>
-                    <a:p>
-                      <a:pPr>
-                        <a:defRPr sz="1200"/>
-                      </a:pPr>
-                      <a:r>
-                        <a:t>87.0%</a:t>
+                        <a:t>43.5억원</a:t>
+                      </a:r>
+                    </a:p>
+                  </a:txBody>
+                  <a:tcPr/>
+                </a:tc>
+                <a:tc>
+                  <a:txBody>
+                    <a:bodyPr/>
+                    <a:lstStyle/>
+                    <a:p>
+                      <a:pPr>
+                        <a:defRPr sz="1200"/>
+                      </a:pPr>
+                      <a:r>
+                        <a:t>89.8%</a:t>
                       </a:r>
                     </a:p>
                   </a:txBody>
@@ -4887,37 +4909,37 @@
                         <a:defRPr sz="1200"/>
                       </a:pPr>
                       <a:r>
-                        <a:t>75건</a:t>
-                      </a:r>
-                    </a:p>
-                  </a:txBody>
-                  <a:tcPr/>
-                </a:tc>
-                <a:tc>
-                  <a:txBody>
-                    <a:bodyPr/>
-                    <a:lstStyle/>
-                    <a:p>
-                      <a:pPr>
-                        <a:defRPr sz="1200"/>
-                      </a:pPr>
-                      <a:r>
-                        <a:t>38.6억원</a:t>
-                      </a:r>
-                    </a:p>
-                  </a:txBody>
-                  <a:tcPr/>
-                </a:tc>
-                <a:tc>
-                  <a:txBody>
-                    <a:bodyPr/>
-                    <a:lstStyle/>
-                    <a:p>
-                      <a:pPr>
-                        <a:defRPr sz="1200"/>
-                      </a:pPr>
-                      <a:r>
-                        <a:t>76.9%</a:t>
+                        <a:t>74건</a:t>
+                      </a:r>
+                    </a:p>
+                  </a:txBody>
+                  <a:tcPr/>
+                </a:tc>
+                <a:tc>
+                  <a:txBody>
+                    <a:bodyPr/>
+                    <a:lstStyle/>
+                    <a:p>
+                      <a:pPr>
+                        <a:defRPr sz="1200"/>
+                      </a:pPr>
+                      <a:r>
+                        <a:t>22.2억원</a:t>
+                      </a:r>
+                    </a:p>
+                  </a:txBody>
+                  <a:tcPr/>
+                </a:tc>
+                <a:tc>
+                  <a:txBody>
+                    <a:bodyPr/>
+                    <a:lstStyle/>
+                    <a:p>
+                      <a:pPr>
+                        <a:defRPr sz="1200"/>
+                      </a:pPr>
+                      <a:r>
+                        <a:t>80.7%</a:t>
                       </a:r>
                     </a:p>
                   </a:txBody>
@@ -4949,37 +4971,37 @@
                         <a:defRPr sz="1200"/>
                       </a:pPr>
                       <a:r>
-                        <a:t>70건</a:t>
-                      </a:r>
-                    </a:p>
-                  </a:txBody>
-                  <a:tcPr/>
-                </a:tc>
-                <a:tc>
-                  <a:txBody>
-                    <a:bodyPr/>
-                    <a:lstStyle/>
-                    <a:p>
-                      <a:pPr>
-                        <a:defRPr sz="1200"/>
-                      </a:pPr>
-                      <a:r>
-                        <a:t>30.9억원</a:t>
-                      </a:r>
-                    </a:p>
-                  </a:txBody>
-                  <a:tcPr/>
-                </a:tc>
-                <a:tc>
-                  <a:txBody>
-                    <a:bodyPr/>
-                    <a:lstStyle/>
-                    <a:p>
-                      <a:pPr>
-                        <a:defRPr sz="1200"/>
-                      </a:pPr>
-                      <a:r>
-                        <a:t>84.4%</a:t>
+                        <a:t>68건</a:t>
+                      </a:r>
+                    </a:p>
+                  </a:txBody>
+                  <a:tcPr/>
+                </a:tc>
+                <a:tc>
+                  <a:txBody>
+                    <a:bodyPr/>
+                    <a:lstStyle/>
+                    <a:p>
+                      <a:pPr>
+                        <a:defRPr sz="1200"/>
+                      </a:pPr>
+                      <a:r>
+                        <a:t>19.6억원</a:t>
+                      </a:r>
+                    </a:p>
+                  </a:txBody>
+                  <a:tcPr/>
+                </a:tc>
+                <a:tc>
+                  <a:txBody>
+                    <a:bodyPr/>
+                    <a:lstStyle/>
+                    <a:p>
+                      <a:pPr>
+                        <a:defRPr sz="1200"/>
+                      </a:pPr>
+                      <a:r>
+                        <a:t>72.9%</a:t>
                       </a:r>
                     </a:p>
                   </a:txBody>
@@ -4996,52 +5018,52 @@
                         <a:defRPr sz="1200"/>
                       </a:pPr>
                       <a:r>
-                        <a:t>물류</a:t>
-                      </a:r>
-                    </a:p>
-                  </a:txBody>
-                  <a:tcPr/>
-                </a:tc>
-                <a:tc>
-                  <a:txBody>
-                    <a:bodyPr/>
-                    <a:lstStyle/>
-                    <a:p>
-                      <a:pPr>
-                        <a:defRPr sz="1200"/>
-                      </a:pPr>
-                      <a:r>
-                        <a:t>29건</a:t>
-                      </a:r>
-                    </a:p>
-                  </a:txBody>
-                  <a:tcPr/>
-                </a:tc>
-                <a:tc>
-                  <a:txBody>
-                    <a:bodyPr/>
-                    <a:lstStyle/>
-                    <a:p>
-                      <a:pPr>
-                        <a:defRPr sz="1200"/>
-                      </a:pPr>
-                      <a:r>
-                        <a:t>12.2억원</a:t>
-                      </a:r>
-                    </a:p>
-                  </a:txBody>
-                  <a:tcPr/>
-                </a:tc>
-                <a:tc>
-                  <a:txBody>
-                    <a:bodyPr/>
-                    <a:lstStyle/>
-                    <a:p>
-                      <a:pPr>
-                        <a:defRPr sz="1200"/>
-                      </a:pPr>
-                      <a:r>
-                        <a:t>98.2%</a:t>
+                        <a:t>공공기관</a:t>
+                      </a:r>
+                    </a:p>
+                  </a:txBody>
+                  <a:tcPr/>
+                </a:tc>
+                <a:tc>
+                  <a:txBody>
+                    <a:bodyPr/>
+                    <a:lstStyle/>
+                    <a:p>
+                      <a:pPr>
+                        <a:defRPr sz="1200"/>
+                      </a:pPr>
+                      <a:r>
+                        <a:t>16건</a:t>
+                      </a:r>
+                    </a:p>
+                  </a:txBody>
+                  <a:tcPr/>
+                </a:tc>
+                <a:tc>
+                  <a:txBody>
+                    <a:bodyPr/>
+                    <a:lstStyle/>
+                    <a:p>
+                      <a:pPr>
+                        <a:defRPr sz="1200"/>
+                      </a:pPr>
+                      <a:r>
+                        <a:t>9.1억원</a:t>
+                      </a:r>
+                    </a:p>
+                  </a:txBody>
+                  <a:tcPr/>
+                </a:tc>
+                <a:tc>
+                  <a:txBody>
+                    <a:bodyPr/>
+                    <a:lstStyle/>
+                    <a:p>
+                      <a:pPr>
+                        <a:defRPr sz="1200"/>
+                      </a:pPr>
+                      <a:r>
+                        <a:t>88.2%</a:t>
                       </a:r>
                     </a:p>
                   </a:txBody>
@@ -5058,52 +5080,52 @@
                         <a:defRPr sz="1200"/>
                       </a:pPr>
                       <a:r>
-                        <a:t>공공기관</a:t>
-                      </a:r>
-                    </a:p>
-                  </a:txBody>
-                  <a:tcPr/>
-                </a:tc>
-                <a:tc>
-                  <a:txBody>
-                    <a:bodyPr/>
-                    <a:lstStyle/>
-                    <a:p>
-                      <a:pPr>
-                        <a:defRPr sz="1200"/>
-                      </a:pPr>
-                      <a:r>
-                        <a:t>8건</a:t>
-                      </a:r>
-                    </a:p>
-                  </a:txBody>
-                  <a:tcPr/>
-                </a:tc>
-                <a:tc>
-                  <a:txBody>
-                    <a:bodyPr/>
-                    <a:lstStyle/>
-                    <a:p>
-                      <a:pPr>
-                        <a:defRPr sz="1200"/>
-                      </a:pPr>
-                      <a:r>
-                        <a:t>8.8억원</a:t>
-                      </a:r>
-                    </a:p>
-                  </a:txBody>
-                  <a:tcPr/>
-                </a:tc>
-                <a:tc>
-                  <a:txBody>
-                    <a:bodyPr/>
-                    <a:lstStyle/>
-                    <a:p>
-                      <a:pPr>
-                        <a:defRPr sz="1200"/>
-                      </a:pPr>
-                      <a:r>
-                        <a:t>65.2%</a:t>
+                        <a:t>물류</a:t>
+                      </a:r>
+                    </a:p>
+                  </a:txBody>
+                  <a:tcPr/>
+                </a:tc>
+                <a:tc>
+                  <a:txBody>
+                    <a:bodyPr/>
+                    <a:lstStyle/>
+                    <a:p>
+                      <a:pPr>
+                        <a:defRPr sz="1200"/>
+                      </a:pPr>
+                      <a:r>
+                        <a:t>26건</a:t>
+                      </a:r>
+                    </a:p>
+                  </a:txBody>
+                  <a:tcPr/>
+                </a:tc>
+                <a:tc>
+                  <a:txBody>
+                    <a:bodyPr/>
+                    <a:lstStyle/>
+                    <a:p>
+                      <a:pPr>
+                        <a:defRPr sz="1200"/>
+                      </a:pPr>
+                      <a:r>
+                        <a:t>6.8억원</a:t>
+                      </a:r>
+                    </a:p>
+                  </a:txBody>
+                  <a:tcPr/>
+                </a:tc>
+                <a:tc>
+                  <a:txBody>
+                    <a:bodyPr/>
+                    <a:lstStyle/>
+                    <a:p>
+                      <a:pPr>
+                        <a:defRPr sz="1200"/>
+                      </a:pPr>
+                      <a:r>
+                        <a:t>93.5%</a:t>
                       </a:r>
                     </a:p>
                   </a:txBody>
@@ -5314,37 +5336,37 @@
                         <a:defRPr sz="1200"/>
                       </a:pPr>
                       <a:r>
-                        <a:t>전기자재</a:t>
-                      </a:r>
-                    </a:p>
-                  </a:txBody>
-                  <a:tcPr/>
-                </a:tc>
-                <a:tc>
-                  <a:txBody>
-                    <a:bodyPr/>
-                    <a:lstStyle/>
-                    <a:p>
-                      <a:pPr>
-                        <a:defRPr sz="1200"/>
-                      </a:pPr>
-                      <a:r>
-                        <a:t>23건</a:t>
-                      </a:r>
-                    </a:p>
-                  </a:txBody>
-                  <a:tcPr/>
-                </a:tc>
-                <a:tc>
-                  <a:txBody>
-                    <a:bodyPr/>
-                    <a:lstStyle/>
-                    <a:p>
-                      <a:pPr>
-                        <a:defRPr sz="1200"/>
-                      </a:pPr>
-                      <a:r>
-                        <a:t>2.7억원</a:t>
+                        <a:t>배관자재</a:t>
+                      </a:r>
+                    </a:p>
+                  </a:txBody>
+                  <a:tcPr/>
+                </a:tc>
+                <a:tc>
+                  <a:txBody>
+                    <a:bodyPr/>
+                    <a:lstStyle/>
+                    <a:p>
+                      <a:pPr>
+                        <a:defRPr sz="1200"/>
+                      </a:pPr>
+                      <a:r>
+                        <a:t>17건</a:t>
+                      </a:r>
+                    </a:p>
+                  </a:txBody>
+                  <a:tcPr/>
+                </a:tc>
+                <a:tc>
+                  <a:txBody>
+                    <a:bodyPr/>
+                    <a:lstStyle/>
+                    <a:p>
+                      <a:pPr>
+                        <a:defRPr sz="1200"/>
+                      </a:pPr>
+                      <a:r>
+                        <a:t>2.3억원</a:t>
                       </a:r>
                     </a:p>
                   </a:txBody>
@@ -5361,37 +5383,37 @@
                         <a:defRPr sz="1200"/>
                       </a:pPr>
                       <a:r>
-                        <a:t>배관자재</a:t>
-                      </a:r>
-                    </a:p>
-                  </a:txBody>
-                  <a:tcPr/>
-                </a:tc>
-                <a:tc>
-                  <a:txBody>
-                    <a:bodyPr/>
-                    <a:lstStyle/>
-                    <a:p>
-                      <a:pPr>
-                        <a:defRPr sz="1200"/>
-                      </a:pPr>
-                      <a:r>
-                        <a:t>20건</a:t>
-                      </a:r>
-                    </a:p>
-                  </a:txBody>
-                  <a:tcPr/>
-                </a:tc>
-                <a:tc>
-                  <a:txBody>
-                    <a:bodyPr/>
-                    <a:lstStyle/>
-                    <a:p>
-                      <a:pPr>
-                        <a:defRPr sz="1200"/>
-                      </a:pPr>
-                      <a:r>
-                        <a:t>2.7억원</a:t>
+                        <a:t>공압유압</a:t>
+                      </a:r>
+                    </a:p>
+                  </a:txBody>
+                  <a:tcPr/>
+                </a:tc>
+                <a:tc>
+                  <a:txBody>
+                    <a:bodyPr/>
+                    <a:lstStyle/>
+                    <a:p>
+                      <a:pPr>
+                        <a:defRPr sz="1200"/>
+                      </a:pPr>
+                      <a:r>
+                        <a:t>19건</a:t>
+                      </a:r>
+                    </a:p>
+                  </a:txBody>
+                  <a:tcPr/>
+                </a:tc>
+                <a:tc>
+                  <a:txBody>
+                    <a:bodyPr/>
+                    <a:lstStyle/>
+                    <a:p>
+                      <a:pPr>
+                        <a:defRPr sz="1200"/>
+                      </a:pPr>
+                      <a:r>
+                        <a:t>2.1억원</a:t>
                       </a:r>
                     </a:p>
                   </a:txBody>
@@ -5408,37 +5430,37 @@
                         <a:defRPr sz="1200"/>
                       </a:pPr>
                       <a:r>
-                        <a:t>동력전달</a:t>
-                      </a:r>
-                    </a:p>
-                  </a:txBody>
-                  <a:tcPr/>
-                </a:tc>
-                <a:tc>
-                  <a:txBody>
-                    <a:bodyPr/>
-                    <a:lstStyle/>
-                    <a:p>
-                      <a:pPr>
-                        <a:defRPr sz="1200"/>
-                      </a:pPr>
-                      <a:r>
-                        <a:t>23건</a:t>
-                      </a:r>
-                    </a:p>
-                  </a:txBody>
-                  <a:tcPr/>
-                </a:tc>
-                <a:tc>
-                  <a:txBody>
-                    <a:bodyPr/>
-                    <a:lstStyle/>
-                    <a:p>
-                      <a:pPr>
-                        <a:defRPr sz="1200"/>
-                      </a:pPr>
-                      <a:r>
-                        <a:t>2.5억원</a:t>
+                        <a:t>측정기기</a:t>
+                      </a:r>
+                    </a:p>
+                  </a:txBody>
+                  <a:tcPr/>
+                </a:tc>
+                <a:tc>
+                  <a:txBody>
+                    <a:bodyPr/>
+                    <a:lstStyle/>
+                    <a:p>
+                      <a:pPr>
+                        <a:defRPr sz="1200"/>
+                      </a:pPr>
+                      <a:r>
+                        <a:t>16건</a:t>
+                      </a:r>
+                    </a:p>
+                  </a:txBody>
+                  <a:tcPr/>
+                </a:tc>
+                <a:tc>
+                  <a:txBody>
+                    <a:bodyPr/>
+                    <a:lstStyle/>
+                    <a:p>
+                      <a:pPr>
+                        <a:defRPr sz="1200"/>
+                      </a:pPr>
+                      <a:r>
+                        <a:t>2.1억원</a:t>
                       </a:r>
                     </a:p>
                   </a:txBody>
@@ -5455,37 +5477,37 @@
                         <a:defRPr sz="1200"/>
                       </a:pPr>
                       <a:r>
-                        <a:t>안전용품</a:t>
-                      </a:r>
-                    </a:p>
-                  </a:txBody>
-                  <a:tcPr/>
-                </a:tc>
-                <a:tc>
-                  <a:txBody>
-                    <a:bodyPr/>
-                    <a:lstStyle/>
-                    <a:p>
-                      <a:pPr>
-                        <a:defRPr sz="1200"/>
-                      </a:pPr>
-                      <a:r>
-                        <a:t>20건</a:t>
-                      </a:r>
-                    </a:p>
-                  </a:txBody>
-                  <a:tcPr/>
-                </a:tc>
-                <a:tc>
-                  <a:txBody>
-                    <a:bodyPr/>
-                    <a:lstStyle/>
-                    <a:p>
-                      <a:pPr>
-                        <a:defRPr sz="1200"/>
-                      </a:pPr>
-                      <a:r>
-                        <a:t>2.2억원</a:t>
+                        <a:t>윤활제</a:t>
+                      </a:r>
+                    </a:p>
+                  </a:txBody>
+                  <a:tcPr/>
+                </a:tc>
+                <a:tc>
+                  <a:txBody>
+                    <a:bodyPr/>
+                    <a:lstStyle/>
+                    <a:p>
+                      <a:pPr>
+                        <a:defRPr sz="1200"/>
+                      </a:pPr>
+                      <a:r>
+                        <a:t>19건</a:t>
+                      </a:r>
+                    </a:p>
+                  </a:txBody>
+                  <a:tcPr/>
+                </a:tc>
+                <a:tc>
+                  <a:txBody>
+                    <a:bodyPr/>
+                    <a:lstStyle/>
+                    <a:p>
+                      <a:pPr>
+                        <a:defRPr sz="1200"/>
+                      </a:pPr>
+                      <a:r>
+                        <a:t>2.0억원</a:t>
                       </a:r>
                     </a:p>
                   </a:txBody>
@@ -5502,7 +5524,7 @@
                         <a:defRPr sz="1200"/>
                       </a:pPr>
                       <a:r>
-                        <a:t>체결부품</a:t>
+                        <a:t>공구류</a:t>
                       </a:r>
                     </a:p>
                   </a:txBody>
@@ -5532,7 +5554,7 @@
                         <a:defRPr sz="1200"/>
                       </a:pPr>
                       <a:r>
-                        <a:t>2.1억원</a:t>
+                        <a:t>2.0억원</a:t>
                       </a:r>
                     </a:p>
                   </a:txBody>
@@ -5549,7 +5571,7 @@
                         <a:defRPr sz="1200"/>
                       </a:pPr>
                       <a:r>
-                        <a:t>공구류</a:t>
+                        <a:t>용접자재</a:t>
                       </a:r>
                     </a:p>
                   </a:txBody>
@@ -5579,7 +5601,7 @@
                         <a:defRPr sz="1200"/>
                       </a:pPr>
                       <a:r>
-                        <a:t>2.1억원</a:t>
+                        <a:t>1.9억원</a:t>
                       </a:r>
                     </a:p>
                   </a:txBody>
@@ -5794,7 +5816,7 @@
                         <a:defRPr sz="1200"/>
                       </a:pPr>
                       <a:r>
-                        <a:t>240건</a:t>
+                        <a:t>247건</a:t>
                       </a:r>
                     </a:p>
                   </a:txBody>
@@ -5841,22 +5863,22 @@
                         <a:defRPr sz="1200"/>
                       </a:pPr>
                       <a:r>
-                        <a:t>24건</a:t>
-                      </a:r>
-                    </a:p>
-                  </a:txBody>
-                  <a:tcPr/>
-                </a:tc>
-                <a:tc>
-                  <a:txBody>
-                    <a:bodyPr/>
-                    <a:lstStyle/>
-                    <a:p>
-                      <a:pPr>
-                        <a:defRPr sz="1200"/>
-                      </a:pPr>
-                      <a:r>
-                        <a:t>8.1억원</a:t>
+                        <a:t>23건</a:t>
+                      </a:r>
+                    </a:p>
+                  </a:txBody>
+                  <a:tcPr/>
+                </a:tc>
+                <a:tc>
+                  <a:txBody>
+                    <a:bodyPr/>
+                    <a:lstStyle/>
+                    <a:p>
+                      <a:pPr>
+                        <a:defRPr sz="1200"/>
+                      </a:pPr>
+                      <a:r>
+                        <a:t>2.6억원</a:t>
                       </a:r>
                     </a:p>
                   </a:txBody>
@@ -5888,22 +5910,22 @@
                         <a:defRPr sz="1200"/>
                       </a:pPr>
                       <a:r>
-                        <a:t>18건</a:t>
-                      </a:r>
-                    </a:p>
-                  </a:txBody>
-                  <a:tcPr/>
-                </a:tc>
-                <a:tc>
-                  <a:txBody>
-                    <a:bodyPr/>
-                    <a:lstStyle/>
-                    <a:p>
-                      <a:pPr>
-                        <a:defRPr sz="1200"/>
-                      </a:pPr>
-                      <a:r>
-                        <a:t>9.8억원</a:t>
+                        <a:t>10건</a:t>
+                      </a:r>
+                    </a:p>
+                  </a:txBody>
+                  <a:tcPr/>
+                </a:tc>
+                <a:tc>
+                  <a:txBody>
+                    <a:bodyPr/>
+                    <a:lstStyle/>
+                    <a:p>
+                      <a:pPr>
+                        <a:defRPr sz="1200"/>
+                      </a:pPr>
+                      <a:r>
+                        <a:t>3.0억원</a:t>
                       </a:r>
                     </a:p>
                   </a:txBody>
@@ -5935,22 +5957,22 @@
                         <a:defRPr sz="1200"/>
                       </a:pPr>
                       <a:r>
-                        <a:t>19건</a:t>
-                      </a:r>
-                    </a:p>
-                  </a:txBody>
-                  <a:tcPr/>
-                </a:tc>
-                <a:tc>
-                  <a:txBody>
-                    <a:bodyPr/>
-                    <a:lstStyle/>
-                    <a:p>
-                      <a:pPr>
-                        <a:defRPr sz="1200"/>
-                      </a:pPr>
-                      <a:r>
-                        <a:t>9.4억원</a:t>
+                        <a:t>23건</a:t>
+                      </a:r>
+                    </a:p>
+                  </a:txBody>
+                  <a:tcPr/>
+                </a:tc>
+                <a:tc>
+                  <a:txBody>
+                    <a:bodyPr/>
+                    <a:lstStyle/>
+                    <a:p>
+                      <a:pPr>
+                        <a:defRPr sz="1200"/>
+                      </a:pPr>
+                      <a:r>
+                        <a:t>10.0억원</a:t>
                       </a:r>
                     </a:p>
                   </a:txBody>
@@ -6066,6 +6088,17 @@
             </a:pPr>
             <a:r>
               <a:t>• 연체가 해소된 고객은 다음 보고에서 목록에서 빼고 그 사실을 따로 적는다</a:t>
+            </a:r>
+          </a:p>
+          <a:p>
+            <a:pPr>
+              <a:spcAft>
+                <a:spcPts val="800"/>
+              </a:spcAft>
+              <a:defRPr sz="1500"/>
+            </a:pPr>
+            <a:r>
+              <a:t>• 신용등급이 D로 낮아진 고객과의 새 거래는 선입금이나 보증보험 증권을 조건으로 한다</a:t>
             </a:r>
           </a:p>
         </p:txBody>
@@ -6166,22 +6199,22 @@
                         <a:defRPr sz="1200"/>
                       </a:pPr>
                       <a:r>
-                        <a:t>C143</a:t>
-                      </a:r>
-                    </a:p>
-                  </a:txBody>
-                  <a:tcPr/>
-                </a:tc>
-                <a:tc>
-                  <a:txBody>
-                    <a:bodyPr/>
-                    <a:lstStyle/>
-                    <a:p>
-                      <a:pPr>
-                        <a:defRPr sz="1200"/>
-                      </a:pPr>
-                      <a:r>
-                        <a:t>백두산업(주)</a:t>
+                        <a:t>C080</a:t>
+                      </a:r>
+                    </a:p>
+                  </a:txBody>
+                  <a:tcPr/>
+                </a:tc>
+                <a:tc>
+                  <a:txBody>
+                    <a:bodyPr/>
+                    <a:lstStyle/>
+                    <a:p>
+                      <a:pPr>
+                        <a:defRPr sz="1200"/>
+                      </a:pPr>
+                      <a:r>
+                        <a:t>주식회사 다온빛자재</a:t>
                       </a:r>
                     </a:p>
                   </a:txBody>
@@ -6211,7 +6244,7 @@
                         <a:defRPr sz="1200"/>
                       </a:pPr>
                       <a:r>
-                        <a:t>4.7억원</a:t>
+                        <a:t>3.2억원</a:t>
                       </a:r>
                     </a:p>
                   </a:txBody>
@@ -6228,52 +6261,52 @@
                         <a:defRPr sz="1200"/>
                       </a:pPr>
                       <a:r>
-                        <a:t>C242</a:t>
-                      </a:r>
-                    </a:p>
-                  </a:txBody>
-                  <a:tcPr/>
-                </a:tc>
-                <a:tc>
-                  <a:txBody>
-                    <a:bodyPr/>
-                    <a:lstStyle/>
-                    <a:p>
-                      <a:pPr>
-                        <a:defRPr sz="1200"/>
-                      </a:pPr>
-                      <a:r>
-                        <a:t>주식회사 삼우화학</a:t>
-                      </a:r>
-                    </a:p>
-                  </a:txBody>
-                  <a:tcPr/>
-                </a:tc>
-                <a:tc>
-                  <a:txBody>
-                    <a:bodyPr/>
-                    <a:lstStyle/>
-                    <a:p>
-                      <a:pPr>
-                        <a:defRPr sz="1200"/>
-                      </a:pPr>
-                      <a:r>
-                        <a:t>2건</a:t>
-                      </a:r>
-                    </a:p>
-                  </a:txBody>
-                  <a:tcPr/>
-                </a:tc>
-                <a:tc>
-                  <a:txBody>
-                    <a:bodyPr/>
-                    <a:lstStyle/>
-                    <a:p>
-                      <a:pPr>
-                        <a:defRPr sz="1200"/>
-                      </a:pPr>
-                      <a:r>
-                        <a:t>3.7억원</a:t>
+                        <a:t>C141</a:t>
+                      </a:r>
+                    </a:p>
+                  </a:txBody>
+                  <a:tcPr/>
+                </a:tc>
+                <a:tc>
+                  <a:txBody>
+                    <a:bodyPr/>
+                    <a:lstStyle/>
+                    <a:p>
+                      <a:pPr>
+                        <a:defRPr sz="1200"/>
+                      </a:pPr>
+                      <a:r>
+                        <a:t>나래솔자재(주)</a:t>
+                      </a:r>
+                    </a:p>
+                  </a:txBody>
+                  <a:tcPr/>
+                </a:tc>
+                <a:tc>
+                  <a:txBody>
+                    <a:bodyPr/>
+                    <a:lstStyle/>
+                    <a:p>
+                      <a:pPr>
+                        <a:defRPr sz="1200"/>
+                      </a:pPr>
+                      <a:r>
+                        <a:t>5건</a:t>
+                      </a:r>
+                    </a:p>
+                  </a:txBody>
+                  <a:tcPr/>
+                </a:tc>
+                <a:tc>
+                  <a:txBody>
+                    <a:bodyPr/>
+                    <a:lstStyle/>
+                    <a:p>
+                      <a:pPr>
+                        <a:defRPr sz="1200"/>
+                      </a:pPr>
+                      <a:r>
+                        <a:t>2.1억원</a:t>
                       </a:r>
                     </a:p>
                   </a:txBody>
@@ -6290,52 +6323,52 @@
                         <a:defRPr sz="1200"/>
                       </a:pPr>
                       <a:r>
-                        <a:t>C192</a:t>
-                      </a:r>
-                    </a:p>
-                  </a:txBody>
-                  <a:tcPr/>
-                </a:tc>
-                <a:tc>
-                  <a:txBody>
-                    <a:bodyPr/>
-                    <a:lstStyle/>
-                    <a:p>
-                      <a:pPr>
-                        <a:defRPr sz="1200"/>
-                      </a:pPr>
-                      <a:r>
-                        <a:t>주식회사 한마음개발</a:t>
-                      </a:r>
-                    </a:p>
-                  </a:txBody>
-                  <a:tcPr/>
-                </a:tc>
-                <a:tc>
-                  <a:txBody>
-                    <a:bodyPr/>
-                    <a:lstStyle/>
-                    <a:p>
-                      <a:pPr>
-                        <a:defRPr sz="1200"/>
-                      </a:pPr>
-                      <a:r>
-                        <a:t>1건</a:t>
-                      </a:r>
-                    </a:p>
-                  </a:txBody>
-                  <a:tcPr/>
-                </a:tc>
-                <a:tc>
-                  <a:txBody>
-                    <a:bodyPr/>
-                    <a:lstStyle/>
-                    <a:p>
-                      <a:pPr>
-                        <a:defRPr sz="1200"/>
-                      </a:pPr>
-                      <a:r>
-                        <a:t>3.3억원</a:t>
+                        <a:t>C146</a:t>
+                      </a:r>
+                    </a:p>
+                  </a:txBody>
+                  <a:tcPr/>
+                </a:tc>
+                <a:tc>
+                  <a:txBody>
+                    <a:bodyPr/>
+                    <a:lstStyle/>
+                    <a:p>
+                      <a:pPr>
+                        <a:defRPr sz="1200"/>
+                      </a:pPr>
+                      <a:r>
+                        <a:t>주식회사 너울테크</a:t>
+                      </a:r>
+                    </a:p>
+                  </a:txBody>
+                  <a:tcPr/>
+                </a:tc>
+                <a:tc>
+                  <a:txBody>
+                    <a:bodyPr/>
+                    <a:lstStyle/>
+                    <a:p>
+                      <a:pPr>
+                        <a:defRPr sz="1200"/>
+                      </a:pPr>
+                      <a:r>
+                        <a:t>6건</a:t>
+                      </a:r>
+                    </a:p>
+                  </a:txBody>
+                  <a:tcPr/>
+                </a:tc>
+                <a:tc>
+                  <a:txBody>
+                    <a:bodyPr/>
+                    <a:lstStyle/>
+                    <a:p>
+                      <a:pPr>
+                        <a:defRPr sz="1200"/>
+                      </a:pPr>
+                      <a:r>
+                        <a:t>2.1억원</a:t>
                       </a:r>
                     </a:p>
                   </a:txBody>
@@ -6352,22 +6385,22 @@
                         <a:defRPr sz="1200"/>
                       </a:pPr>
                       <a:r>
-                        <a:t>C036</a:t>
-                      </a:r>
-                    </a:p>
-                  </a:txBody>
-                  <a:tcPr/>
-                </a:tc>
-                <a:tc>
-                  <a:txBody>
-                    <a:bodyPr/>
-                    <a:lstStyle/>
-                    <a:p>
-                      <a:pPr>
-                        <a:defRPr sz="1200"/>
-                      </a:pPr>
-                      <a:r>
-                        <a:t>주식회사 새솔화학</a:t>
+                        <a:t>C124</a:t>
+                      </a:r>
+                    </a:p>
+                  </a:txBody>
+                  <a:tcPr/>
+                </a:tc>
+                <a:tc>
+                  <a:txBody>
+                    <a:bodyPr/>
+                    <a:lstStyle/>
+                    <a:p>
+                      <a:pPr>
+                        <a:defRPr sz="1200"/>
+                      </a:pPr>
+                      <a:r>
+                        <a:t>주식회사 마루솔전기</a:t>
                       </a:r>
                     </a:p>
                   </a:txBody>
@@ -6397,7 +6430,7 @@
                         <a:defRPr sz="1200"/>
                       </a:pPr>
                       <a:r>
-                        <a:t>3.1억원</a:t>
+                        <a:t>1.9억원</a:t>
                       </a:r>
                     </a:p>
                   </a:txBody>
@@ -6414,22 +6447,22 @@
                         <a:defRPr sz="1200"/>
                       </a:pPr>
                       <a:r>
-                        <a:t>C158</a:t>
-                      </a:r>
-                    </a:p>
-                  </a:txBody>
-                  <a:tcPr/>
-                </a:tc>
-                <a:tc>
-                  <a:txBody>
-                    <a:bodyPr/>
-                    <a:lstStyle/>
-                    <a:p>
-                      <a:pPr>
-                        <a:defRPr sz="1200"/>
-                      </a:pPr>
-                      <a:r>
-                        <a:t>주식회사 미래정밀</a:t>
+                        <a:t>C248</a:t>
+                      </a:r>
+                    </a:p>
+                  </a:txBody>
+                  <a:tcPr/>
+                </a:tc>
+                <a:tc>
+                  <a:txBody>
+                    <a:bodyPr/>
+                    <a:lstStyle/>
+                    <a:p>
+                      <a:pPr>
+                        <a:defRPr sz="1200"/>
+                      </a:pPr>
+                      <a:r>
+                        <a:t>주식회사 벼리기계</a:t>
                       </a:r>
                     </a:p>
                   </a:txBody>
@@ -6459,7 +6492,7 @@
                         <a:defRPr sz="1200"/>
                       </a:pPr>
                       <a:r>
-                        <a:t>2.9억원</a:t>
+                        <a:t>1.7억원</a:t>
                       </a:r>
                     </a:p>
                   </a:txBody>
